--- a/PPT/DevOps.pptx
+++ b/PPT/DevOps.pptx
@@ -338,7 +338,7 @@
           <a:p>
             <a:fld id="{5BCAD085-E8A6-8845-BD4E-CB4CCA059FC4}" type="datetimeFigureOut">
               <a:rPr lang="en-US" smtClean="0"/>
-              <a:t>7/22/2026</a:t>
+              <a:t>8/24/2026</a:t>
             </a:fld>
             <a:endParaRPr lang="en-US"/>
           </a:p>
@@ -508,7 +508,7 @@
           <a:p>
             <a:fld id="{5BCAD085-E8A6-8845-BD4E-CB4CCA059FC4}" type="datetimeFigureOut">
               <a:rPr lang="en-US" smtClean="0"/>
-              <a:t>7/22/2026</a:t>
+              <a:t>8/24/2026</a:t>
             </a:fld>
             <a:endParaRPr lang="en-US"/>
           </a:p>
@@ -688,7 +688,7 @@
           <a:p>
             <a:fld id="{5BCAD085-E8A6-8845-BD4E-CB4CCA059FC4}" type="datetimeFigureOut">
               <a:rPr lang="en-US" smtClean="0"/>
-              <a:t>7/22/2026</a:t>
+              <a:t>8/24/2026</a:t>
             </a:fld>
             <a:endParaRPr lang="en-US"/>
           </a:p>
@@ -858,7 +858,7 @@
           <a:p>
             <a:fld id="{5BCAD085-E8A6-8845-BD4E-CB4CCA059FC4}" type="datetimeFigureOut">
               <a:rPr lang="en-US" smtClean="0"/>
-              <a:t>7/22/2026</a:t>
+              <a:t>8/24/2026</a:t>
             </a:fld>
             <a:endParaRPr lang="en-US"/>
           </a:p>
@@ -1104,7 +1104,7 @@
           <a:p>
             <a:fld id="{5BCAD085-E8A6-8845-BD4E-CB4CCA059FC4}" type="datetimeFigureOut">
               <a:rPr lang="en-US" smtClean="0"/>
-              <a:t>7/22/2026</a:t>
+              <a:t>8/24/2026</a:t>
             </a:fld>
             <a:endParaRPr lang="en-US"/>
           </a:p>
@@ -1392,7 +1392,7 @@
           <a:p>
             <a:fld id="{5BCAD085-E8A6-8845-BD4E-CB4CCA059FC4}" type="datetimeFigureOut">
               <a:rPr lang="en-US" smtClean="0"/>
-              <a:t>7/22/2026</a:t>
+              <a:t>8/24/2026</a:t>
             </a:fld>
             <a:endParaRPr lang="en-US"/>
           </a:p>
@@ -1814,7 +1814,7 @@
           <a:p>
             <a:fld id="{5BCAD085-E8A6-8845-BD4E-CB4CCA059FC4}" type="datetimeFigureOut">
               <a:rPr lang="en-US" smtClean="0"/>
-              <a:t>7/22/2026</a:t>
+              <a:t>8/24/2026</a:t>
             </a:fld>
             <a:endParaRPr lang="en-US"/>
           </a:p>
@@ -1932,7 +1932,7 @@
           <a:p>
             <a:fld id="{5BCAD085-E8A6-8845-BD4E-CB4CCA059FC4}" type="datetimeFigureOut">
               <a:rPr lang="en-US" smtClean="0"/>
-              <a:t>7/22/2026</a:t>
+              <a:t>8/24/2026</a:t>
             </a:fld>
             <a:endParaRPr lang="en-US"/>
           </a:p>
@@ -2027,7 +2027,7 @@
           <a:p>
             <a:fld id="{5BCAD085-E8A6-8845-BD4E-CB4CCA059FC4}" type="datetimeFigureOut">
               <a:rPr lang="en-US" smtClean="0"/>
-              <a:t>7/22/2026</a:t>
+              <a:t>8/24/2026</a:t>
             </a:fld>
             <a:endParaRPr lang="en-US"/>
           </a:p>
@@ -2304,7 +2304,7 @@
           <a:p>
             <a:fld id="{5BCAD085-E8A6-8845-BD4E-CB4CCA059FC4}" type="datetimeFigureOut">
               <a:rPr lang="en-US" smtClean="0"/>
-              <a:t>7/22/2026</a:t>
+              <a:t>8/24/2026</a:t>
             </a:fld>
             <a:endParaRPr lang="en-US"/>
           </a:p>
@@ -2557,7 +2557,7 @@
           <a:p>
             <a:fld id="{5BCAD085-E8A6-8845-BD4E-CB4CCA059FC4}" type="datetimeFigureOut">
               <a:rPr lang="en-US" smtClean="0"/>
-              <a:t>7/22/2026</a:t>
+              <a:t>8/24/2026</a:t>
             </a:fld>
             <a:endParaRPr lang="en-US"/>
           </a:p>
@@ -2770,7 +2770,7 @@
           <a:p>
             <a:fld id="{5BCAD085-E8A6-8845-BD4E-CB4CCA059FC4}" type="datetimeFigureOut">
               <a:rPr lang="en-US" smtClean="0"/>
-              <a:t>7/22/2026</a:t>
+              <a:t>8/24/2026</a:t>
             </a:fld>
             <a:endParaRPr lang="en-US"/>
           </a:p>
